--- a/assets/pptx/catalog-787.pptx
+++ b/assets/pptx/catalog-787.pptx
@@ -3247,7 +3247,7 @@
                 <a:ea typeface="Ebrima"/>
                 <a:cs typeface="Ebrima"/>
               </a:rPr>
-              <a:t>በሕይወቴ ዘመን (8x)</a:t>
+              <a:t>በሕይወቴ ዘመን 8x</a:t>
             </a:r>
           </a:p>
           <a:p>
@@ -3265,7 +3265,7 @@
                 <a:ea typeface="Ebrima"/>
                 <a:cs typeface="Ebrima"/>
               </a:rPr>
-              <a:t>አልተውከኝም ፈጽሞ አልረሳኸኝም (2x)</a:t>
+              <a:t>አልተውከኝም ፈጽሞ አልረሳኸኝም 2x</a:t>
             </a:r>
           </a:p>
           <a:p>
@@ -3283,7 +3283,7 @@
                 <a:ea typeface="Ebrima"/>
                 <a:cs typeface="Ebrima"/>
               </a:rPr>
-              <a:t>ለአንድ አፍታ አልረሳኸኝም (2x)</a:t>
+              <a:t>ለአንድ አፍታ አልረሳኸኝም 2x</a:t>
             </a:r>
           </a:p>
         </p:txBody>
@@ -3422,7 +3422,7 @@
                 <a:ea typeface="Ebrima"/>
                 <a:cs typeface="Ebrima"/>
               </a:rPr>
-              <a:t>ጠብቀኸኛል (4x)</a:t>
+              <a:t>ጠብቀኸኛል 4x</a:t>
             </a:r>
           </a:p>
         </p:txBody>
@@ -3507,7 +3507,7 @@
                 <a:ea typeface="Ebrima"/>
                 <a:cs typeface="Ebrima"/>
               </a:rPr>
-              <a:t>አቤት ያንተስ ስራ ስንቱ ይወራ (2x)</a:t>
+              <a:t>አቤት ያንተስ ስራ ስንቱ ይወራ 2x</a:t>
             </a:r>
           </a:p>
         </p:txBody>
@@ -3574,7 +3574,7 @@
                 <a:ea typeface="Ebrima"/>
                 <a:cs typeface="Ebrima"/>
               </a:rPr>
-              <a:t>በሕይወቴ ዘመን (8x)</a:t>
+              <a:t>በሕይወቴ ዘመን 8x</a:t>
             </a:r>
           </a:p>
           <a:p>
@@ -3592,7 +3592,7 @@
                 <a:ea typeface="Ebrima"/>
                 <a:cs typeface="Ebrima"/>
               </a:rPr>
-              <a:t>አልተውከኝም ፈጽሞ አልረሳኸኝም (2x)</a:t>
+              <a:t>አልተውከኝም ፈጽሞ አልረሳኸኝም 2x</a:t>
             </a:r>
           </a:p>
           <a:p>
@@ -3610,7 +3610,7 @@
                 <a:ea typeface="Ebrima"/>
                 <a:cs typeface="Ebrima"/>
               </a:rPr>
-              <a:t>ለአንድ አፍታ አልረሳኸኝም (2x)</a:t>
+              <a:t>ለአንድ አፍታ አልረሳኸኝም 2x</a:t>
             </a:r>
           </a:p>
         </p:txBody>
@@ -3749,7 +3749,7 @@
                 <a:ea typeface="Ebrima"/>
                 <a:cs typeface="Ebrima"/>
               </a:rPr>
-              <a:t>ሆነኸኝ ሞገስ (4x)</a:t>
+              <a:t>ሆነኸኝ ሞገስ 4x</a:t>
             </a:r>
           </a:p>
         </p:txBody>
@@ -3834,7 +3834,7 @@
                 <a:ea typeface="Ebrima"/>
                 <a:cs typeface="Ebrima"/>
               </a:rPr>
-              <a:t>አቤት ያንተስ ስራ ስንቱ ይወራ (2x)</a:t>
+              <a:t>አቤት ያንተስ ስራ ስንቱ ይወራ 2x</a:t>
             </a:r>
           </a:p>
         </p:txBody>
@@ -3901,7 +3901,7 @@
                 <a:ea typeface="Ebrima"/>
                 <a:cs typeface="Ebrima"/>
               </a:rPr>
-              <a:t>በሕይወቴ ዘመን (8x)</a:t>
+              <a:t>በሕይወቴ ዘመን 8x</a:t>
             </a:r>
           </a:p>
           <a:p>
@@ -3919,7 +3919,7 @@
                 <a:ea typeface="Ebrima"/>
                 <a:cs typeface="Ebrima"/>
               </a:rPr>
-              <a:t>አልተውከኝም ፈጽሞ አልረሳኸኝም (2x)</a:t>
+              <a:t>አልተውከኝም ፈጽሞ አልረሳኸኝም 2x</a:t>
             </a:r>
           </a:p>
           <a:p>
@@ -3937,7 +3937,7 @@
                 <a:ea typeface="Ebrima"/>
                 <a:cs typeface="Ebrima"/>
               </a:rPr>
-              <a:t>ለአንድ አፍታ አልረሳኸኝም (2x)</a:t>
+              <a:t>ለአንድ አፍታ አልረሳኸኝም 2x</a:t>
             </a:r>
           </a:p>
         </p:txBody>
